--- a/pitch/template.pptx
+++ b/pitch/template.pptx
@@ -1,6 +1,6 @@
 
 <file path=ppt/presentation.xml><?xml version="1.0" encoding="utf-8"?>
-<p:presentation xmlns:a="http://schemas.openxmlformats.org/drawingml/2006/main" xmlns:r="http://schemas.openxmlformats.org/officeDocument/2006/relationships" xmlns:mc="http://schemas.openxmlformats.org/markup-compatibility/2006" xmlns:mv="urn:schemas-microsoft-com:mac:vml" xmlns:p="http://schemas.openxmlformats.org/presentationml/2006/main" xmlns:c="http://schemas.openxmlformats.org/drawingml/2006/chart" xmlns:dgm="http://schemas.openxmlformats.org/drawingml/2006/diagram" xmlns:o="urn:schemas-microsoft-com:office:office" xmlns:v="urn:schemas-microsoft-com:vml" xmlns:pvml="urn:schemas-microsoft-com:office:powerpoint" xmlns:com="http://schemas.openxmlformats.org/drawingml/2006/compatibility" xmlns:p14="http://schemas.microsoft.com/office/powerpoint/2010/main" xmlns:p15="http://schemas.microsoft.com/office/powerpoint/2012/main" xmlns:ahyp="http://schemas.microsoft.com/office/drawing/2018/hyperlinkcolor" autoCompressPictures="0" embedTrueTypeFonts="1" strictFirstAndLastChars="0" saveSubsetFonts="1">
+<p:presentation xmlns:a="http://schemas.openxmlformats.org/drawingml/2006/main" xmlns:r="http://schemas.openxmlformats.org/officeDocument/2006/relationships" xmlns:mc="http://schemas.openxmlformats.org/markup-compatibility/2006" xmlns:mv="urn:schemas-microsoft-com:mac:vml" xmlns:p="http://schemas.openxmlformats.org/presentationml/2006/main" xmlns:c="http://schemas.openxmlformats.org/drawingml/2006/chart" xmlns:dgm="http://schemas.openxmlformats.org/drawingml/2006/diagram" xmlns:o="urn:schemas-microsoft-com:office:office" xmlns:v="urn:schemas-microsoft-com:vml" xmlns:pvml="urn:schemas-microsoft-com:office:powerpoint" xmlns:com="http://schemas.openxmlformats.org/drawingml/2006/compatibility" xmlns:p14="http://schemas.microsoft.com/office/powerpoint/2010/main" xmlns:p15="http://schemas.microsoft.com/office/powerpoint/2012/main" xmlns:ahyp="http://schemas.microsoft.com/office/drawing/2018/hyperlinkcolor" autoCompressPictures="0" strictFirstAndLastChars="0" saveSubsetFonts="1">
   <p:sldMasterIdLst>
     <p:sldMasterId id="2147483659" r:id="rId4"/>
   </p:sldMasterIdLst>
@@ -24,26 +24,11 @@
     <p:sldId id="269" r:id="rId19"/>
     <p:sldId id="270" r:id="rId20"/>
     <p:sldId id="271" r:id="rId21"/>
+    <p:sldId id="272" r:id="rId22"/>
+    <p:sldId id="273" r:id="rId23"/>
   </p:sldIdLst>
   <p:sldSz cy="5143500" cx="9144000"/>
   <p:notesSz cx="6858000" cy="9144000"/>
-  <p:embeddedFontLst>
-    <p:embeddedFont>
-      <p:font typeface="Google Sans Flex Medium"/>
-      <p:regular r:id="rId22"/>
-      <p:bold r:id="rId23"/>
-    </p:embeddedFont>
-    <p:embeddedFont>
-      <p:font typeface="Google Sans Flex"/>
-      <p:regular r:id="rId24"/>
-      <p:bold r:id="rId25"/>
-    </p:embeddedFont>
-    <p:embeddedFont>
-      <p:font typeface="Google Sans Flex SemiBold"/>
-      <p:regular r:id="rId26"/>
-      <p:bold r:id="rId27"/>
-    </p:embeddedFont>
-  </p:embeddedFontLst>
   <p:defaultTextStyle>
     <a:defPPr lvl="0" marR="0" rtl="0" algn="l">
       <a:lnSpc>
@@ -8409,6 +8394,252 @@
 </p:sld>
 </file>
 
+<file path=ppt/slides/slide17.xml><?xml version="1.0" encoding="utf-8"?>
+<p:sld xmlns:a="http://schemas.openxmlformats.org/drawingml/2006/main" xmlns:r="http://schemas.openxmlformats.org/officeDocument/2006/relationships" xmlns:mc="http://schemas.openxmlformats.org/markup-compatibility/2006" xmlns:mv="urn:schemas-microsoft-com:mac:vml" xmlns:p="http://schemas.openxmlformats.org/presentationml/2006/main" xmlns:c="http://schemas.openxmlformats.org/drawingml/2006/chart" xmlns:dgm="http://schemas.openxmlformats.org/drawingml/2006/diagram" xmlns:o="urn:schemas-microsoft-com:office:office" xmlns:v="urn:schemas-microsoft-com:vml" xmlns:pvml="urn:schemas-microsoft-com:office:powerpoint" xmlns:com="http://schemas.openxmlformats.org/drawingml/2006/compatibility" xmlns:p14="http://schemas.microsoft.com/office/powerpoint/2010/main" xmlns:p15="http://schemas.microsoft.com/office/powerpoint/2012/main" xmlns:ahyp="http://schemas.microsoft.com/office/drawing/2018/hyperlinkcolor">
+  <p:cSld>
+    <p:spTree>
+      <p:nvGrpSpPr>
+        <p:cNvPr id="163" name="Shape 163"/>
+        <p:cNvGrpSpPr/>
+        <p:nvPr/>
+      </p:nvGrpSpPr>
+      <p:grpSpPr>
+        <a:xfrm>
+          <a:off x="0" y="0"/>
+          <a:ext cx="0" cy="0"/>
+          <a:chOff x="0" y="0"/>
+          <a:chExt cx="0" cy="0"/>
+        </a:xfrm>
+      </p:grpSpPr>
+      <p:pic>
+        <p:nvPicPr>
+          <p:cNvPr id="164" name="Google Shape;164;p27" title="Frame 144.png"/>
+          <p:cNvPicPr preferRelativeResize="0"/>
+          <p:nvPr/>
+        </p:nvPicPr>
+        <p:blipFill rotWithShape="1">
+          <a:blip r:embed="rId3">
+            <a:alphaModFix/>
+          </a:blip>
+          <a:srcRect b="98001" l="0" r="0" t="0"/>
+          <a:stretch/>
+        </p:blipFill>
+        <p:spPr>
+          <a:xfrm>
+            <a:off x="0" y="5093562"/>
+            <a:ext cx="9144000" cy="54275"/>
+          </a:xfrm>
+          <a:prstGeom prst="rect">
+            <a:avLst/>
+          </a:prstGeom>
+          <a:noFill/>
+          <a:ln>
+            <a:noFill/>
+          </a:ln>
+        </p:spPr>
+      </p:pic>
+      <p:pic>
+        <p:nvPicPr>
+          <p:cNvPr id="165" name="Google Shape;165;p27" title="Group 427319979.png"/>
+          <p:cNvPicPr preferRelativeResize="0"/>
+          <p:nvPr/>
+        </p:nvPicPr>
+        <p:blipFill>
+          <a:blip r:embed="rId4">
+            <a:alphaModFix/>
+          </a:blip>
+          <a:stretch>
+            <a:fillRect/>
+          </a:stretch>
+        </p:blipFill>
+        <p:spPr>
+          <a:xfrm>
+            <a:off x="0" y="1"/>
+            <a:ext cx="9144000" cy="507359"/>
+          </a:xfrm>
+          <a:prstGeom prst="rect">
+            <a:avLst/>
+          </a:prstGeom>
+          <a:noFill/>
+          <a:ln>
+            <a:noFill/>
+          </a:ln>
+        </p:spPr>
+      </p:pic>
+      <p:sp>
+        <p:nvSpPr>
+          <p:cNvPr id="166" name="Google Shape;166;p27"/>
+          <p:cNvSpPr/>
+          <p:nvPr/>
+        </p:nvSpPr>
+        <p:spPr>
+          <a:xfrm>
+            <a:off x="-29250" y="5071875"/>
+            <a:ext cx="9173400" cy="97800"/>
+          </a:xfrm>
+          <a:prstGeom prst="rect">
+            <a:avLst/>
+          </a:prstGeom>
+          <a:solidFill>
+            <a:schemeClr val="dk1"/>
+          </a:solidFill>
+          <a:ln>
+            <a:noFill/>
+          </a:ln>
+        </p:spPr>
+        <p:txBody>
+          <a:bodyPr anchorCtr="0" anchor="ctr" bIns="91425" lIns="91425" spcFirstLastPara="1" rIns="91425" wrap="square" tIns="91425">
+            <a:noAutofit/>
+          </a:bodyPr>
+          <a:lstStyle/>
+          <a:p>
+            <a:pPr indent="0" lvl="0" marL="0" rtl="0" algn="ctr">
+              <a:spcBef>
+                <a:spcPts val="0"/>
+              </a:spcBef>
+              <a:spcAft>
+                <a:spcPts val="0"/>
+              </a:spcAft>
+              <a:buNone/>
+            </a:pPr>
+            <a:r>
+              <a:t/>
+            </a:r>
+            <a:endParaRPr/>
+          </a:p>
+        </p:txBody>
+      </p:sp>
+    </p:spTree>
+  </p:cSld>
+  <p:clrMapOvr>
+    <a:masterClrMapping/>
+  </p:clrMapOvr>
+</p:sld>
+</file>
+
+<file path=ppt/slides/slide18.xml><?xml version="1.0" encoding="utf-8"?>
+<p:sld xmlns:a="http://schemas.openxmlformats.org/drawingml/2006/main" xmlns:r="http://schemas.openxmlformats.org/officeDocument/2006/relationships" xmlns:mc="http://schemas.openxmlformats.org/markup-compatibility/2006" xmlns:mv="urn:schemas-microsoft-com:mac:vml" xmlns:p="http://schemas.openxmlformats.org/presentationml/2006/main" xmlns:c="http://schemas.openxmlformats.org/drawingml/2006/chart" xmlns:dgm="http://schemas.openxmlformats.org/drawingml/2006/diagram" xmlns:o="urn:schemas-microsoft-com:office:office" xmlns:v="urn:schemas-microsoft-com:vml" xmlns:pvml="urn:schemas-microsoft-com:office:powerpoint" xmlns:com="http://schemas.openxmlformats.org/drawingml/2006/compatibility" xmlns:p14="http://schemas.microsoft.com/office/powerpoint/2010/main" xmlns:p15="http://schemas.microsoft.com/office/powerpoint/2012/main" xmlns:ahyp="http://schemas.microsoft.com/office/drawing/2018/hyperlinkcolor">
+  <p:cSld>
+    <p:spTree>
+      <p:nvGrpSpPr>
+        <p:cNvPr id="163" name="Shape 163"/>
+        <p:cNvGrpSpPr/>
+        <p:nvPr/>
+      </p:nvGrpSpPr>
+      <p:grpSpPr>
+        <a:xfrm>
+          <a:off x="0" y="0"/>
+          <a:ext cx="0" cy="0"/>
+          <a:chOff x="0" y="0"/>
+          <a:chExt cx="0" cy="0"/>
+        </a:xfrm>
+      </p:grpSpPr>
+      <p:pic>
+        <p:nvPicPr>
+          <p:cNvPr id="164" name="Google Shape;164;p27" title="Frame 144.png"/>
+          <p:cNvPicPr preferRelativeResize="0"/>
+          <p:nvPr/>
+        </p:nvPicPr>
+        <p:blipFill rotWithShape="1">
+          <a:blip r:embed="rId3">
+            <a:alphaModFix/>
+          </a:blip>
+          <a:srcRect b="98001" l="0" r="0" t="0"/>
+          <a:stretch/>
+        </p:blipFill>
+        <p:spPr>
+          <a:xfrm>
+            <a:off x="0" y="5093562"/>
+            <a:ext cx="9144000" cy="54275"/>
+          </a:xfrm>
+          <a:prstGeom prst="rect">
+            <a:avLst/>
+          </a:prstGeom>
+          <a:noFill/>
+          <a:ln>
+            <a:noFill/>
+          </a:ln>
+        </p:spPr>
+      </p:pic>
+      <p:pic>
+        <p:nvPicPr>
+          <p:cNvPr id="165" name="Google Shape;165;p27" title="Group 427319979.png"/>
+          <p:cNvPicPr preferRelativeResize="0"/>
+          <p:nvPr/>
+        </p:nvPicPr>
+        <p:blipFill>
+          <a:blip r:embed="rId4">
+            <a:alphaModFix/>
+          </a:blip>
+          <a:stretch>
+            <a:fillRect/>
+          </a:stretch>
+        </p:blipFill>
+        <p:spPr>
+          <a:xfrm>
+            <a:off x="0" y="1"/>
+            <a:ext cx="9144000" cy="507359"/>
+          </a:xfrm>
+          <a:prstGeom prst="rect">
+            <a:avLst/>
+          </a:prstGeom>
+          <a:noFill/>
+          <a:ln>
+            <a:noFill/>
+          </a:ln>
+        </p:spPr>
+      </p:pic>
+      <p:sp>
+        <p:nvSpPr>
+          <p:cNvPr id="166" name="Google Shape;166;p27"/>
+          <p:cNvSpPr/>
+          <p:nvPr/>
+        </p:nvSpPr>
+        <p:spPr>
+          <a:xfrm>
+            <a:off x="-29250" y="5071875"/>
+            <a:ext cx="9173400" cy="97800"/>
+          </a:xfrm>
+          <a:prstGeom prst="rect">
+            <a:avLst/>
+          </a:prstGeom>
+          <a:solidFill>
+            <a:schemeClr val="dk1"/>
+          </a:solidFill>
+          <a:ln>
+            <a:noFill/>
+          </a:ln>
+        </p:spPr>
+        <p:txBody>
+          <a:bodyPr anchorCtr="0" anchor="ctr" bIns="91425" lIns="91425" spcFirstLastPara="1" rIns="91425" wrap="square" tIns="91425">
+            <a:noAutofit/>
+          </a:bodyPr>
+          <a:lstStyle/>
+          <a:p>
+            <a:pPr indent="0" lvl="0" marL="0" rtl="0" algn="ctr">
+              <a:spcBef>
+                <a:spcPts val="0"/>
+              </a:spcBef>
+              <a:spcAft>
+                <a:spcPts val="0"/>
+              </a:spcAft>
+              <a:buNone/>
+            </a:pPr>
+            <a:r>
+              <a:t/>
+            </a:r>
+            <a:endParaRPr/>
+          </a:p>
+        </p:txBody>
+      </p:sp>
+    </p:spTree>
+  </p:cSld>
+  <p:clrMapOvr>
+    <a:masterClrMapping/>
+  </p:clrMapOvr>
+</p:sld>
+</file>
+
 <file path=ppt/slides/slide2.xml><?xml version="1.0" encoding="utf-8"?>
 <p:sld xmlns:a="http://schemas.openxmlformats.org/drawingml/2006/main" xmlns:r="http://schemas.openxmlformats.org/officeDocument/2006/relationships" xmlns:mc="http://schemas.openxmlformats.org/markup-compatibility/2006" xmlns:mv="urn:schemas-microsoft-com:mac:vml" xmlns:p="http://schemas.openxmlformats.org/presentationml/2006/main" xmlns:c="http://schemas.openxmlformats.org/drawingml/2006/chart" xmlns:dgm="http://schemas.openxmlformats.org/drawingml/2006/diagram" xmlns:o="urn:schemas-microsoft-com:office:office" xmlns:v="urn:schemas-microsoft-com:vml" xmlns:pvml="urn:schemas-microsoft-com:office:powerpoint" xmlns:com="http://schemas.openxmlformats.org/drawingml/2006/compatibility" xmlns:p14="http://schemas.microsoft.com/office/powerpoint/2010/main" xmlns:p15="http://schemas.microsoft.com/office/powerpoint/2012/main" xmlns:ahyp="http://schemas.microsoft.com/office/drawing/2018/hyperlinkcolor">
   <p:cSld>
